--- a/presentations/burt.pptx
+++ b/presentations/burt.pptx
@@ -1415,7 +1415,175 @@
               <a:rPr b="0" lang="en-US" sz="4400" spc="-1" strike="noStrike">
                 <a:latin typeface="Arial"/>
               </a:rPr>
-              <a:t>Click to edit the title text format</a:t>
+              <a:t>C</a:t>
+            </a:r>
+            <a:r>
+              <a:rPr b="0" lang="en-US" sz="4400" spc="-1" strike="noStrike">
+                <a:latin typeface="Arial"/>
+              </a:rPr>
+              <a:t>li</a:t>
+            </a:r>
+            <a:r>
+              <a:rPr b="0" lang="en-US" sz="4400" spc="-1" strike="noStrike">
+                <a:latin typeface="Arial"/>
+              </a:rPr>
+              <a:t>c</a:t>
+            </a:r>
+            <a:r>
+              <a:rPr b="0" lang="en-US" sz="4400" spc="-1" strike="noStrike">
+                <a:latin typeface="Arial"/>
+              </a:rPr>
+              <a:t>k</a:t>
+            </a:r>
+            <a:r>
+              <a:rPr b="0" lang="en-US" sz="4400" spc="-1" strike="noStrike">
+                <a:latin typeface="Arial"/>
+              </a:rPr>
+              <a:t> </a:t>
+            </a:r>
+            <a:r>
+              <a:rPr b="0" lang="en-US" sz="4400" spc="-1" strike="noStrike">
+                <a:latin typeface="Arial"/>
+              </a:rPr>
+              <a:t>t</a:t>
+            </a:r>
+            <a:r>
+              <a:rPr b="0" lang="en-US" sz="4400" spc="-1" strike="noStrike">
+                <a:latin typeface="Arial"/>
+              </a:rPr>
+              <a:t>o</a:t>
+            </a:r>
+            <a:r>
+              <a:rPr b="0" lang="en-US" sz="4400" spc="-1" strike="noStrike">
+                <a:latin typeface="Arial"/>
+              </a:rPr>
+              <a:t> </a:t>
+            </a:r>
+            <a:r>
+              <a:rPr b="0" lang="en-US" sz="4400" spc="-1" strike="noStrike">
+                <a:latin typeface="Arial"/>
+              </a:rPr>
+              <a:t>e</a:t>
+            </a:r>
+            <a:r>
+              <a:rPr b="0" lang="en-US" sz="4400" spc="-1" strike="noStrike">
+                <a:latin typeface="Arial"/>
+              </a:rPr>
+              <a:t>d</a:t>
+            </a:r>
+            <a:r>
+              <a:rPr b="0" lang="en-US" sz="4400" spc="-1" strike="noStrike">
+                <a:latin typeface="Arial"/>
+              </a:rPr>
+              <a:t>it </a:t>
+            </a:r>
+            <a:r>
+              <a:rPr b="0" lang="en-US" sz="4400" spc="-1" strike="noStrike">
+                <a:latin typeface="Arial"/>
+              </a:rPr>
+              <a:t>t</a:t>
+            </a:r>
+            <a:r>
+              <a:rPr b="0" lang="en-US" sz="4400" spc="-1" strike="noStrike">
+                <a:latin typeface="Arial"/>
+              </a:rPr>
+              <a:t>h</a:t>
+            </a:r>
+            <a:r>
+              <a:rPr b="0" lang="en-US" sz="4400" spc="-1" strike="noStrike">
+                <a:latin typeface="Arial"/>
+              </a:rPr>
+              <a:t>e</a:t>
+            </a:r>
+            <a:r>
+              <a:rPr b="0" lang="en-US" sz="4400" spc="-1" strike="noStrike">
+                <a:latin typeface="Arial"/>
+              </a:rPr>
+              <a:t> </a:t>
+            </a:r>
+            <a:r>
+              <a:rPr b="0" lang="en-US" sz="4400" spc="-1" strike="noStrike">
+                <a:latin typeface="Arial"/>
+              </a:rPr>
+              <a:t>ti</a:t>
+            </a:r>
+            <a:r>
+              <a:rPr b="0" lang="en-US" sz="4400" spc="-1" strike="noStrike">
+                <a:latin typeface="Arial"/>
+              </a:rPr>
+              <a:t>tl</a:t>
+            </a:r>
+            <a:r>
+              <a:rPr b="0" lang="en-US" sz="4400" spc="-1" strike="noStrike">
+                <a:latin typeface="Arial"/>
+              </a:rPr>
+              <a:t>e</a:t>
+            </a:r>
+            <a:r>
+              <a:rPr b="0" lang="en-US" sz="4400" spc="-1" strike="noStrike">
+                <a:latin typeface="Arial"/>
+              </a:rPr>
+              <a:t> </a:t>
+            </a:r>
+            <a:r>
+              <a:rPr b="0" lang="en-US" sz="4400" spc="-1" strike="noStrike">
+                <a:latin typeface="Arial"/>
+              </a:rPr>
+              <a:t>t</a:t>
+            </a:r>
+            <a:r>
+              <a:rPr b="0" lang="en-US" sz="4400" spc="-1" strike="noStrike">
+                <a:latin typeface="Arial"/>
+              </a:rPr>
+              <a:t>e</a:t>
+            </a:r>
+            <a:r>
+              <a:rPr b="0" lang="en-US" sz="4400" spc="-1" strike="noStrike">
+                <a:latin typeface="Arial"/>
+              </a:rPr>
+              <a:t>x</a:t>
+            </a:r>
+            <a:r>
+              <a:rPr b="0" lang="en-US" sz="4400" spc="-1" strike="noStrike">
+                <a:latin typeface="Arial"/>
+              </a:rPr>
+              <a:t>t </a:t>
+            </a:r>
+            <a:r>
+              <a:rPr b="0" lang="en-US" sz="4400" spc="-1" strike="noStrike">
+                <a:latin typeface="Arial"/>
+              </a:rPr>
+              <a:t>f</a:t>
+            </a:r>
+            <a:r>
+              <a:rPr b="0" lang="en-US" sz="4400" spc="-1" strike="noStrike">
+                <a:latin typeface="Arial"/>
+              </a:rPr>
+              <a:t>o</a:t>
+            </a:r>
+            <a:r>
+              <a:rPr b="0" lang="en-US" sz="4400" spc="-1" strike="noStrike">
+                <a:latin typeface="Arial"/>
+              </a:rPr>
+              <a:t>r</a:t>
+            </a:r>
+            <a:r>
+              <a:rPr b="0" lang="en-US" sz="4400" spc="-1" strike="noStrike">
+                <a:latin typeface="Arial"/>
+              </a:rPr>
+              <a:t>m</a:t>
+            </a:r>
+            <a:r>
+              <a:rPr b="0" lang="en-US" sz="4400" spc="-1" strike="noStrike">
+                <a:latin typeface="Arial"/>
+              </a:rPr>
+              <a:t>a</a:t>
+            </a:r>
+            <a:r>
+              <a:rPr b="0" lang="en-US" sz="4400" spc="-1" strike="noStrike">
+                <a:latin typeface="Arial"/>
+              </a:rPr>
+              <a:t>t</a:t>
             </a:r>
             <a:endParaRPr b="0" lang="en-US" sz="4400" spc="-1" strike="noStrike">
               <a:latin typeface="Arial"/>
@@ -1700,7 +1868,7 @@
           </a:bodyPr>
           <a:p>
             <a:pPr algn="r"/>
-            <a:fld id="{B4B1BE9A-2146-4D64-868F-AE8A01ABEBC7}" type="slidenum">
+            <a:fld id="{80C98EAA-8D51-4BF8-A52A-F714FAE5CDAA}" type="slidenum">
               <a:rPr b="0" lang="en-US" sz="1400" spc="-1" strike="noStrike">
                 <a:latin typeface="Times New Roman"/>
               </a:rPr>
@@ -1778,7 +1946,19 @@
               <a:rPr b="0" lang="en-US" sz="4400" spc="-1" strike="noStrike">
                 <a:latin typeface="Arial"/>
               </a:rPr>
-              <a:t>Plan</a:t>
+              <a:t>P</a:t>
+            </a:r>
+            <a:r>
+              <a:rPr b="0" lang="en-US" sz="4400" spc="-1" strike="noStrike">
+                <a:latin typeface="Arial"/>
+              </a:rPr>
+              <a:t>la</a:t>
+            </a:r>
+            <a:r>
+              <a:rPr b="0" lang="en-US" sz="4400" spc="-1" strike="noStrike">
+                <a:latin typeface="Arial"/>
+              </a:rPr>
+              <a:t>n</a:t>
             </a:r>
             <a:endParaRPr b="0" lang="en-US" sz="4400" spc="-1" strike="noStrike">
               <a:latin typeface="Arial"/>
@@ -1963,8 +2143,8 @@
         </p:blipFill>
         <p:spPr>
           <a:xfrm>
-            <a:off x="29520" y="-48600"/>
-            <a:ext cx="10079640" cy="3735720"/>
+            <a:off x="577800" y="5110200"/>
+            <a:ext cx="2178720" cy="532800"/>
           </a:xfrm>
           <a:prstGeom prst="rect">
             <a:avLst/>
@@ -1982,13 +2162,12 @@
         </p:nvPicPr>
         <p:blipFill>
           <a:blip r:embed="rId2"/>
-          <a:srcRect l="11140" t="29302" r="4679" b="15898"/>
           <a:stretch/>
         </p:blipFill>
         <p:spPr>
           <a:xfrm>
-            <a:off x="5166000" y="3355200"/>
-            <a:ext cx="4114440" cy="2285640"/>
+            <a:off x="29520" y="-48600"/>
+            <a:ext cx="10079640" cy="3735720"/>
           </a:xfrm>
           <a:prstGeom prst="rect">
             <a:avLst/>
@@ -2006,12 +2185,13 @@
         </p:nvPicPr>
         <p:blipFill>
           <a:blip r:embed="rId3"/>
+          <a:srcRect l="11140" t="29302" r="4679" b="15898"/>
           <a:stretch/>
         </p:blipFill>
         <p:spPr>
           <a:xfrm>
-            <a:off x="291960" y="4210200"/>
-            <a:ext cx="3772440" cy="819000"/>
+            <a:off x="5166000" y="3355200"/>
+            <a:ext cx="4114440" cy="2285640"/>
           </a:xfrm>
           <a:prstGeom prst="rect">
             <a:avLst/>
@@ -2033,8 +2213,8 @@
         </p:blipFill>
         <p:spPr>
           <a:xfrm>
-            <a:off x="9144000" y="3687120"/>
-            <a:ext cx="887040" cy="483120"/>
+            <a:off x="291960" y="4210200"/>
+            <a:ext cx="3772440" cy="819000"/>
           </a:xfrm>
           <a:prstGeom prst="rect">
             <a:avLst/>
@@ -2044,9 +2224,32 @@
           </a:ln>
         </p:spPr>
       </p:pic>
-      <p:sp>
-        <p:nvSpPr>
-          <p:cNvPr id="47" name=""/>
+      <p:pic>
+        <p:nvPicPr>
+          <p:cNvPr id="47" name="" descr=""/>
+          <p:cNvPicPr/>
+          <p:nvPr/>
+        </p:nvPicPr>
+        <p:blipFill>
+          <a:blip r:embed="rId5"/>
+          <a:stretch/>
+        </p:blipFill>
+        <p:spPr>
+          <a:xfrm>
+            <a:off x="9144000" y="3687120"/>
+            <a:ext cx="887040" cy="483120"/>
+          </a:xfrm>
+          <a:prstGeom prst="rect">
+            <a:avLst/>
+          </a:prstGeom>
+          <a:ln w="0">
+            <a:noFill/>
+          </a:ln>
+        </p:spPr>
+      </p:pic>
+      <p:sp>
+        <p:nvSpPr>
+          <p:cNvPr id="48" name=""/>
           <p:cNvSpPr/>
           <p:nvPr/>
         </p:nvSpPr>
@@ -2074,7 +2277,7 @@
       </p:sp>
       <p:sp>
         <p:nvSpPr>
-          <p:cNvPr id="48" name=""/>
+          <p:cNvPr id="49" name=""/>
           <p:cNvSpPr/>
           <p:nvPr/>
         </p:nvSpPr>
@@ -2102,7 +2305,7 @@
       </p:sp>
       <p:sp>
         <p:nvSpPr>
-          <p:cNvPr id="49" name=""/>
+          <p:cNvPr id="50" name=""/>
           <p:cNvSpPr/>
           <p:nvPr/>
         </p:nvSpPr>
@@ -2130,7 +2333,7 @@
       </p:sp>
       <p:sp>
         <p:nvSpPr>
-          <p:cNvPr id="50" name=""/>
+          <p:cNvPr id="51" name=""/>
           <p:cNvSpPr/>
           <p:nvPr/>
         </p:nvSpPr>
@@ -2158,7 +2361,7 @@
       </p:sp>
       <p:sp>
         <p:nvSpPr>
-          <p:cNvPr id="51" name=""/>
+          <p:cNvPr id="52" name=""/>
           <p:cNvSpPr/>
           <p:nvPr/>
         </p:nvSpPr>
@@ -2186,7 +2389,7 @@
       </p:sp>
       <p:sp>
         <p:nvSpPr>
-          <p:cNvPr id="52" name=""/>
+          <p:cNvPr id="53" name=""/>
           <p:cNvSpPr/>
           <p:nvPr/>
         </p:nvSpPr>
@@ -2214,7 +2417,7 @@
       </p:sp>
       <p:sp>
         <p:nvSpPr>
-          <p:cNvPr id="53" name=""/>
+          <p:cNvPr id="54" name=""/>
           <p:cNvSpPr/>
           <p:nvPr/>
         </p:nvSpPr>
@@ -2242,7 +2445,7 @@
       </p:sp>
       <p:sp>
         <p:nvSpPr>
-          <p:cNvPr id="54" name=""/>
+          <p:cNvPr id="55" name=""/>
           <p:cNvSpPr/>
           <p:nvPr/>
         </p:nvSpPr>
@@ -2271,7 +2474,7 @@
       </p:sp>
       <p:sp>
         <p:nvSpPr>
-          <p:cNvPr id="55" name=""/>
+          <p:cNvPr id="56" name=""/>
           <p:cNvSpPr txBox="1"/>
           <p:nvPr/>
         </p:nvSpPr>
@@ -2305,29 +2508,114 @@
           </a:p>
         </p:txBody>
       </p:sp>
-      <p:pic>
-        <p:nvPicPr>
-          <p:cNvPr id="56" name="" descr=""/>
-          <p:cNvPicPr/>
+      <p:sp>
+        <p:nvSpPr>
+          <p:cNvPr id="57" name=""/>
+          <p:cNvSpPr txBox="1"/>
           <p:nvPr/>
-        </p:nvPicPr>
-        <p:blipFill>
-          <a:blip r:embed="rId5"/>
-          <a:stretch/>
-        </p:blipFill>
-        <p:spPr>
-          <a:xfrm>
-            <a:off x="457200" y="5257800"/>
-            <a:ext cx="2286000" cy="321480"/>
-          </a:xfrm>
-          <a:prstGeom prst="rect">
-            <a:avLst/>
-          </a:prstGeom>
+        </p:nvSpPr>
+        <p:spPr>
+          <a:xfrm>
+            <a:off x="180000" y="4993200"/>
+            <a:ext cx="914400" cy="302040"/>
+          </a:xfrm>
+          <a:prstGeom prst="rect">
+            <a:avLst/>
+          </a:prstGeom>
+          <a:noFill/>
           <a:ln w="0">
             <a:noFill/>
           </a:ln>
         </p:spPr>
-      </p:pic>
+        <p:txBody>
+          <a:bodyPr lIns="90000" rIns="90000" tIns="45000" bIns="45000">
+            <a:noAutofit/>
+          </a:bodyPr>
+          <a:p>
+            <a:r>
+              <a:rPr b="0" lang="en-US" sz="1500" spc="-1" strike="noStrike">
+                <a:latin typeface="Arial"/>
+              </a:rPr>
+              <a:t>c-size</a:t>
+            </a:r>
+            <a:endParaRPr b="0" lang="en-US" sz="1500" spc="-1" strike="noStrike">
+              <a:latin typeface="Arial"/>
+            </a:endParaRPr>
+          </a:p>
+        </p:txBody>
+      </p:sp>
+      <p:sp>
+        <p:nvSpPr>
+          <p:cNvPr id="58" name=""/>
+          <p:cNvSpPr txBox="1"/>
+          <p:nvPr/>
+        </p:nvSpPr>
+        <p:spPr>
+          <a:xfrm>
+            <a:off x="972000" y="4993560"/>
+            <a:ext cx="1085400" cy="513720"/>
+          </a:xfrm>
+          <a:prstGeom prst="rect">
+            <a:avLst/>
+          </a:prstGeom>
+          <a:noFill/>
+          <a:ln w="0">
+            <a:noFill/>
+          </a:ln>
+        </p:spPr>
+        <p:txBody>
+          <a:bodyPr lIns="90000" rIns="90000" tIns="45000" bIns="45000">
+            <a:noAutofit/>
+          </a:bodyPr>
+          <a:p>
+            <a:r>
+              <a:rPr b="0" lang="en-US" sz="1500" spc="-1" strike="noStrike">
+                <a:latin typeface="Arial"/>
+              </a:rPr>
+              <a:t>c-density</a:t>
+            </a:r>
+            <a:endParaRPr b="0" lang="en-US" sz="1500" spc="-1" strike="noStrike">
+              <a:latin typeface="Arial"/>
+            </a:endParaRPr>
+          </a:p>
+        </p:txBody>
+      </p:sp>
+      <p:sp>
+        <p:nvSpPr>
+          <p:cNvPr id="59" name=""/>
+          <p:cNvSpPr txBox="1"/>
+          <p:nvPr/>
+        </p:nvSpPr>
+        <p:spPr>
+          <a:xfrm>
+            <a:off x="2016360" y="4993920"/>
+            <a:ext cx="1184040" cy="513720"/>
+          </a:xfrm>
+          <a:prstGeom prst="rect">
+            <a:avLst/>
+          </a:prstGeom>
+          <a:noFill/>
+          <a:ln w="0">
+            <a:noFill/>
+          </a:ln>
+        </p:spPr>
+        <p:txBody>
+          <a:bodyPr lIns="90000" rIns="90000" tIns="45000" bIns="45000">
+            <a:noAutofit/>
+          </a:bodyPr>
+          <a:p>
+            <a:r>
+              <a:rPr b="0" lang="en-US" sz="1500" spc="-1" strike="noStrike">
+                <a:latin typeface="Arial"/>
+              </a:rPr>
+              <a:t>c-hierarchy</a:t>
+            </a:r>
+            <a:endParaRPr b="0" lang="en-US" sz="1500" spc="-1" strike="noStrike">
+              <a:latin typeface="Arial"/>
+            </a:endParaRPr>
+          </a:p>
+        </p:txBody>
+      </p:sp>
     </p:spTree>
   </p:cSld>
   <mc:AlternateContent>
